--- a/Bitcoin (und andere Kryptowährungen).pptx
+++ b/Bitcoin (und andere Kryptowährungen).pptx
@@ -4490,7 +4490,7 @@
           <a:p>
             <a:fld id="{ABFF243B-382F-47E1-A467-B90F6651F013}" type="datetimeFigureOut">
               <a:rPr lang="de-DE" smtClean="0"/>
-              <a:t>30.05.2024</a:t>
+              <a:t>21.01.2026</a:t>
             </a:fld>
             <a:endParaRPr lang="de-DE"/>
           </a:p>
@@ -4688,7 +4688,7 @@
           <a:p>
             <a:fld id="{ABFF243B-382F-47E1-A467-B90F6651F013}" type="datetimeFigureOut">
               <a:rPr lang="de-DE" smtClean="0"/>
-              <a:t>30.05.2024</a:t>
+              <a:t>21.01.2026</a:t>
             </a:fld>
             <a:endParaRPr lang="de-DE"/>
           </a:p>
@@ -4896,7 +4896,7 @@
           <a:p>
             <a:fld id="{ABFF243B-382F-47E1-A467-B90F6651F013}" type="datetimeFigureOut">
               <a:rPr lang="de-DE" smtClean="0"/>
-              <a:t>30.05.2024</a:t>
+              <a:t>21.01.2026</a:t>
             </a:fld>
             <a:endParaRPr lang="de-DE"/>
           </a:p>
@@ -5112,7 +5112,7 @@
           <a:p>
             <a:fld id="{ABFF243B-382F-47E1-A467-B90F6651F013}" type="datetimeFigureOut">
               <a:rPr lang="de-DE" smtClean="0"/>
-              <a:t>30.05.2024</a:t>
+              <a:t>21.01.2026</a:t>
             </a:fld>
             <a:endParaRPr lang="de-DE"/>
           </a:p>
@@ -5464,7 +5464,7 @@
           <a:p>
             <a:fld id="{ABFF243B-382F-47E1-A467-B90F6651F013}" type="datetimeFigureOut">
               <a:rPr lang="de-DE" smtClean="0"/>
-              <a:t>30.05.2024</a:t>
+              <a:t>21.01.2026</a:t>
             </a:fld>
             <a:endParaRPr lang="de-DE"/>
           </a:p>
@@ -5729,7 +5729,7 @@
           <a:p>
             <a:fld id="{ABFF243B-382F-47E1-A467-B90F6651F013}" type="datetimeFigureOut">
               <a:rPr lang="de-DE" smtClean="0"/>
-              <a:t>30.05.2024</a:t>
+              <a:t>21.01.2026</a:t>
             </a:fld>
             <a:endParaRPr lang="de-DE"/>
           </a:p>
@@ -6141,7 +6141,7 @@
           <a:p>
             <a:fld id="{ABFF243B-382F-47E1-A467-B90F6651F013}" type="datetimeFigureOut">
               <a:rPr lang="de-DE" smtClean="0"/>
-              <a:t>30.05.2024</a:t>
+              <a:t>21.01.2026</a:t>
             </a:fld>
             <a:endParaRPr lang="de-DE"/>
           </a:p>
@@ -6282,7 +6282,7 @@
           <a:p>
             <a:fld id="{ABFF243B-382F-47E1-A467-B90F6651F013}" type="datetimeFigureOut">
               <a:rPr lang="de-DE" smtClean="0"/>
-              <a:t>30.05.2024</a:t>
+              <a:t>21.01.2026</a:t>
             </a:fld>
             <a:endParaRPr lang="de-DE"/>
           </a:p>
@@ -6395,7 +6395,7 @@
           <a:p>
             <a:fld id="{ABFF243B-382F-47E1-A467-B90F6651F013}" type="datetimeFigureOut">
               <a:rPr lang="de-DE" smtClean="0"/>
-              <a:t>30.05.2024</a:t>
+              <a:t>21.01.2026</a:t>
             </a:fld>
             <a:endParaRPr lang="de-DE"/>
           </a:p>
@@ -6706,7 +6706,7 @@
           <a:p>
             <a:fld id="{ABFF243B-382F-47E1-A467-B90F6651F013}" type="datetimeFigureOut">
               <a:rPr lang="de-DE" smtClean="0"/>
-              <a:t>30.05.2024</a:t>
+              <a:t>21.01.2026</a:t>
             </a:fld>
             <a:endParaRPr lang="de-DE"/>
           </a:p>
@@ -6994,7 +6994,7 @@
           <a:p>
             <a:fld id="{ABFF243B-382F-47E1-A467-B90F6651F013}" type="datetimeFigureOut">
               <a:rPr lang="de-DE" smtClean="0"/>
-              <a:t>30.05.2024</a:t>
+              <a:t>21.01.2026</a:t>
             </a:fld>
             <a:endParaRPr lang="de-DE"/>
           </a:p>
@@ -7235,7 +7235,7 @@
           <a:p>
             <a:fld id="{ABFF243B-382F-47E1-A467-B90F6651F013}" type="datetimeFigureOut">
               <a:rPr lang="de-DE" smtClean="0"/>
-              <a:t>30.05.2024</a:t>
+              <a:t>21.01.2026</a:t>
             </a:fld>
             <a:endParaRPr lang="de-DE"/>
           </a:p>
@@ -9145,7 +9145,7 @@
             </a:pPr>
             <a:r>
               <a:rPr lang="de-DE" dirty="0"/>
-              <a:t>Die klassische "Bitcoin Core"-Wallet lädt zur sicheren Verifikation der Transaktionen die komplette Blockchain (ab 2009) herunter, z.Zt. &gt;600GB.</a:t>
+              <a:t>Die klassische "Bitcoin Core"-Wallet lädt zur sicheren Verifikation der Transaktionen die komplette Blockchain (ab 2009) herunter, z.Zt. &gt;714GB.</a:t>
             </a:r>
           </a:p>
           <a:p>
